--- a/public/fun/cards/creative/creative-20.pptx
+++ b/public/fun/cards/creative/creative-20.pptx
@@ -3099,22 +3099,20 @@
       <p:grpSpPr/>
       <p:sp>
         <p:nvSpPr>
-          <p:cNvPr id="2" name="Oval 1"/>
+          <p:cNvPr id="2" name="Rectangle 1"/>
           <p:cNvSpPr/>
           <p:nvPr/>
         </p:nvSpPr>
         <p:spPr>
           <a:xfrm>
-            <a:off x="2462400" y="158400"/>
-            <a:ext cx="43200" cy="43200"/>
+            <a:off x="252000" y="144000"/>
+            <a:ext cx="201600" cy="21600"/>
           </a:xfrm>
-          <a:prstGeom prst="ellipse">
+          <a:prstGeom prst="rect">
             <a:avLst/>
           </a:prstGeom>
           <a:solidFill>
-            <a:srgbClr val="AE7429">
-              <a:alpha val="70000"/>
-            </a:srgbClr>
+            <a:srgbClr val="FF6F8E"/>
           </a:solidFill>
           <a:ln>
             <a:noFill/>
@@ -3130,661 +3128,14 @@
       </p:sp>
       <p:sp>
         <p:nvSpPr>
-          <p:cNvPr id="3" name="Oval 2"/>
-          <p:cNvSpPr/>
+          <p:cNvPr id="3" name="텍스트"/>
+          <p:cNvSpPr txBox="1"/>
           <p:nvPr/>
         </p:nvSpPr>
         <p:spPr>
           <a:xfrm>
-            <a:off x="2462400" y="266400"/>
-            <a:ext cx="43200" cy="43200"/>
-          </a:xfrm>
-          <a:prstGeom prst="ellipse">
-            <a:avLst/>
-          </a:prstGeom>
-          <a:solidFill>
-            <a:srgbClr val="AE7429">
-              <a:alpha val="57999"/>
-            </a:srgbClr>
-          </a:solidFill>
-          <a:ln>
-            <a:noFill/>
-          </a:ln>
-        </p:spPr>
-        <p:txBody>
-          <a:bodyPr rtlCol="0" anchor="ctr"/>
-          <a:lstStyle/>
-          <a:p>
-            <a:pPr algn="ctr"/>
-          </a:p>
-        </p:txBody>
-      </p:sp>
-      <p:sp>
-        <p:nvSpPr>
-          <p:cNvPr id="4" name="Oval 3"/>
-          <p:cNvSpPr/>
-          <p:nvPr/>
-        </p:nvSpPr>
-        <p:spPr>
-          <a:xfrm>
-            <a:off x="2462400" y="374400"/>
-            <a:ext cx="43200" cy="43200"/>
-          </a:xfrm>
-          <a:prstGeom prst="ellipse">
-            <a:avLst/>
-          </a:prstGeom>
-          <a:solidFill>
-            <a:srgbClr val="AE7429">
-              <a:alpha val="46000"/>
-            </a:srgbClr>
-          </a:solidFill>
-          <a:ln>
-            <a:noFill/>
-          </a:ln>
-        </p:spPr>
-        <p:txBody>
-          <a:bodyPr rtlCol="0" anchor="ctr"/>
-          <a:lstStyle/>
-          <a:p>
-            <a:pPr algn="ctr"/>
-          </a:p>
-        </p:txBody>
-      </p:sp>
-      <p:sp>
-        <p:nvSpPr>
-          <p:cNvPr id="5" name="Oval 4"/>
-          <p:cNvSpPr/>
-          <p:nvPr/>
-        </p:nvSpPr>
-        <p:spPr>
-          <a:xfrm>
-            <a:off x="2462400" y="482400"/>
-            <a:ext cx="43200" cy="43200"/>
-          </a:xfrm>
-          <a:prstGeom prst="ellipse">
-            <a:avLst/>
-          </a:prstGeom>
-          <a:solidFill>
-            <a:srgbClr val="AE7429">
-              <a:alpha val="34000"/>
-            </a:srgbClr>
-          </a:solidFill>
-          <a:ln>
-            <a:noFill/>
-          </a:ln>
-        </p:spPr>
-        <p:txBody>
-          <a:bodyPr rtlCol="0" anchor="ctr"/>
-          <a:lstStyle/>
-          <a:p>
-            <a:pPr algn="ctr"/>
-          </a:p>
-        </p:txBody>
-      </p:sp>
-      <p:sp>
-        <p:nvSpPr>
-          <p:cNvPr id="6" name="Oval 5"/>
-          <p:cNvSpPr/>
-          <p:nvPr/>
-        </p:nvSpPr>
-        <p:spPr>
-          <a:xfrm>
-            <a:off x="2570400" y="158400"/>
-            <a:ext cx="43200" cy="43200"/>
-          </a:xfrm>
-          <a:prstGeom prst="ellipse">
-            <a:avLst/>
-          </a:prstGeom>
-          <a:solidFill>
-            <a:srgbClr val="AE7429">
-              <a:alpha val="70000"/>
-            </a:srgbClr>
-          </a:solidFill>
-          <a:ln>
-            <a:noFill/>
-          </a:ln>
-        </p:spPr>
-        <p:txBody>
-          <a:bodyPr rtlCol="0" anchor="ctr"/>
-          <a:lstStyle/>
-          <a:p>
-            <a:pPr algn="ctr"/>
-          </a:p>
-        </p:txBody>
-      </p:sp>
-      <p:sp>
-        <p:nvSpPr>
-          <p:cNvPr id="7" name="Oval 6"/>
-          <p:cNvSpPr/>
-          <p:nvPr/>
-        </p:nvSpPr>
-        <p:spPr>
-          <a:xfrm>
-            <a:off x="2570400" y="266400"/>
-            <a:ext cx="43200" cy="43200"/>
-          </a:xfrm>
-          <a:prstGeom prst="ellipse">
-            <a:avLst/>
-          </a:prstGeom>
-          <a:solidFill>
-            <a:srgbClr val="AE7429">
-              <a:alpha val="57999"/>
-            </a:srgbClr>
-          </a:solidFill>
-          <a:ln>
-            <a:noFill/>
-          </a:ln>
-        </p:spPr>
-        <p:txBody>
-          <a:bodyPr rtlCol="0" anchor="ctr"/>
-          <a:lstStyle/>
-          <a:p>
-            <a:pPr algn="ctr"/>
-          </a:p>
-        </p:txBody>
-      </p:sp>
-      <p:sp>
-        <p:nvSpPr>
-          <p:cNvPr id="8" name="Oval 7"/>
-          <p:cNvSpPr/>
-          <p:nvPr/>
-        </p:nvSpPr>
-        <p:spPr>
-          <a:xfrm>
-            <a:off x="2570400" y="374400"/>
-            <a:ext cx="43200" cy="43200"/>
-          </a:xfrm>
-          <a:prstGeom prst="ellipse">
-            <a:avLst/>
-          </a:prstGeom>
-          <a:solidFill>
-            <a:srgbClr val="AE7429">
-              <a:alpha val="46000"/>
-            </a:srgbClr>
-          </a:solidFill>
-          <a:ln>
-            <a:noFill/>
-          </a:ln>
-        </p:spPr>
-        <p:txBody>
-          <a:bodyPr rtlCol="0" anchor="ctr"/>
-          <a:lstStyle/>
-          <a:p>
-            <a:pPr algn="ctr"/>
-          </a:p>
-        </p:txBody>
-      </p:sp>
-      <p:sp>
-        <p:nvSpPr>
-          <p:cNvPr id="9" name="Oval 8"/>
-          <p:cNvSpPr/>
-          <p:nvPr/>
-        </p:nvSpPr>
-        <p:spPr>
-          <a:xfrm>
-            <a:off x="2570400" y="482400"/>
-            <a:ext cx="43200" cy="43200"/>
-          </a:xfrm>
-          <a:prstGeom prst="ellipse">
-            <a:avLst/>
-          </a:prstGeom>
-          <a:solidFill>
-            <a:srgbClr val="AE7429">
-              <a:alpha val="34000"/>
-            </a:srgbClr>
-          </a:solidFill>
-          <a:ln>
-            <a:noFill/>
-          </a:ln>
-        </p:spPr>
-        <p:txBody>
-          <a:bodyPr rtlCol="0" anchor="ctr"/>
-          <a:lstStyle/>
-          <a:p>
-            <a:pPr algn="ctr"/>
-          </a:p>
-        </p:txBody>
-      </p:sp>
-      <p:sp>
-        <p:nvSpPr>
-          <p:cNvPr id="10" name="Oval 9"/>
-          <p:cNvSpPr/>
-          <p:nvPr/>
-        </p:nvSpPr>
-        <p:spPr>
-          <a:xfrm>
-            <a:off x="2678400" y="158400"/>
-            <a:ext cx="43200" cy="43200"/>
-          </a:xfrm>
-          <a:prstGeom prst="ellipse">
-            <a:avLst/>
-          </a:prstGeom>
-          <a:solidFill>
-            <a:srgbClr val="AE7429">
-              <a:alpha val="70000"/>
-            </a:srgbClr>
-          </a:solidFill>
-          <a:ln>
-            <a:noFill/>
-          </a:ln>
-        </p:spPr>
-        <p:txBody>
-          <a:bodyPr rtlCol="0" anchor="ctr"/>
-          <a:lstStyle/>
-          <a:p>
-            <a:pPr algn="ctr"/>
-          </a:p>
-        </p:txBody>
-      </p:sp>
-      <p:sp>
-        <p:nvSpPr>
-          <p:cNvPr id="11" name="Oval 10"/>
-          <p:cNvSpPr/>
-          <p:nvPr/>
-        </p:nvSpPr>
-        <p:spPr>
-          <a:xfrm>
-            <a:off x="2678400" y="266400"/>
-            <a:ext cx="43200" cy="43200"/>
-          </a:xfrm>
-          <a:prstGeom prst="ellipse">
-            <a:avLst/>
-          </a:prstGeom>
-          <a:solidFill>
-            <a:srgbClr val="AE7429">
-              <a:alpha val="57999"/>
-            </a:srgbClr>
-          </a:solidFill>
-          <a:ln>
-            <a:noFill/>
-          </a:ln>
-        </p:spPr>
-        <p:txBody>
-          <a:bodyPr rtlCol="0" anchor="ctr"/>
-          <a:lstStyle/>
-          <a:p>
-            <a:pPr algn="ctr"/>
-          </a:p>
-        </p:txBody>
-      </p:sp>
-      <p:sp>
-        <p:nvSpPr>
-          <p:cNvPr id="12" name="Oval 11"/>
-          <p:cNvSpPr/>
-          <p:nvPr/>
-        </p:nvSpPr>
-        <p:spPr>
-          <a:xfrm>
-            <a:off x="2678400" y="374400"/>
-            <a:ext cx="43200" cy="43200"/>
-          </a:xfrm>
-          <a:prstGeom prst="ellipse">
-            <a:avLst/>
-          </a:prstGeom>
-          <a:solidFill>
-            <a:srgbClr val="AE7429">
-              <a:alpha val="46000"/>
-            </a:srgbClr>
-          </a:solidFill>
-          <a:ln>
-            <a:noFill/>
-          </a:ln>
-        </p:spPr>
-        <p:txBody>
-          <a:bodyPr rtlCol="0" anchor="ctr"/>
-          <a:lstStyle/>
-          <a:p>
-            <a:pPr algn="ctr"/>
-          </a:p>
-        </p:txBody>
-      </p:sp>
-      <p:sp>
-        <p:nvSpPr>
-          <p:cNvPr id="13" name="Oval 12"/>
-          <p:cNvSpPr/>
-          <p:nvPr/>
-        </p:nvSpPr>
-        <p:spPr>
-          <a:xfrm>
-            <a:off x="2678400" y="482400"/>
-            <a:ext cx="43200" cy="43200"/>
-          </a:xfrm>
-          <a:prstGeom prst="ellipse">
-            <a:avLst/>
-          </a:prstGeom>
-          <a:solidFill>
-            <a:srgbClr val="AE7429">
-              <a:alpha val="34000"/>
-            </a:srgbClr>
-          </a:solidFill>
-          <a:ln>
-            <a:noFill/>
-          </a:ln>
-        </p:spPr>
-        <p:txBody>
-          <a:bodyPr rtlCol="0" anchor="ctr"/>
-          <a:lstStyle/>
-          <a:p>
-            <a:pPr algn="ctr"/>
-          </a:p>
-        </p:txBody>
-      </p:sp>
-      <p:sp>
-        <p:nvSpPr>
-          <p:cNvPr id="14" name="Oval 13"/>
-          <p:cNvSpPr/>
-          <p:nvPr/>
-        </p:nvSpPr>
-        <p:spPr>
-          <a:xfrm>
-            <a:off x="2786400" y="158400"/>
-            <a:ext cx="43200" cy="43200"/>
-          </a:xfrm>
-          <a:prstGeom prst="ellipse">
-            <a:avLst/>
-          </a:prstGeom>
-          <a:solidFill>
-            <a:srgbClr val="AE7429">
-              <a:alpha val="70000"/>
-            </a:srgbClr>
-          </a:solidFill>
-          <a:ln>
-            <a:noFill/>
-          </a:ln>
-        </p:spPr>
-        <p:txBody>
-          <a:bodyPr rtlCol="0" anchor="ctr"/>
-          <a:lstStyle/>
-          <a:p>
-            <a:pPr algn="ctr"/>
-          </a:p>
-        </p:txBody>
-      </p:sp>
-      <p:sp>
-        <p:nvSpPr>
-          <p:cNvPr id="15" name="Oval 14"/>
-          <p:cNvSpPr/>
-          <p:nvPr/>
-        </p:nvSpPr>
-        <p:spPr>
-          <a:xfrm>
-            <a:off x="2786400" y="266400"/>
-            <a:ext cx="43200" cy="43200"/>
-          </a:xfrm>
-          <a:prstGeom prst="ellipse">
-            <a:avLst/>
-          </a:prstGeom>
-          <a:solidFill>
-            <a:srgbClr val="AE7429">
-              <a:alpha val="57999"/>
-            </a:srgbClr>
-          </a:solidFill>
-          <a:ln>
-            <a:noFill/>
-          </a:ln>
-        </p:spPr>
-        <p:txBody>
-          <a:bodyPr rtlCol="0" anchor="ctr"/>
-          <a:lstStyle/>
-          <a:p>
-            <a:pPr algn="ctr"/>
-          </a:p>
-        </p:txBody>
-      </p:sp>
-      <p:sp>
-        <p:nvSpPr>
-          <p:cNvPr id="16" name="Oval 15"/>
-          <p:cNvSpPr/>
-          <p:nvPr/>
-        </p:nvSpPr>
-        <p:spPr>
-          <a:xfrm>
-            <a:off x="2786400" y="374400"/>
-            <a:ext cx="43200" cy="43200"/>
-          </a:xfrm>
-          <a:prstGeom prst="ellipse">
-            <a:avLst/>
-          </a:prstGeom>
-          <a:solidFill>
-            <a:srgbClr val="AE7429">
-              <a:alpha val="46000"/>
-            </a:srgbClr>
-          </a:solidFill>
-          <a:ln>
-            <a:noFill/>
-          </a:ln>
-        </p:spPr>
-        <p:txBody>
-          <a:bodyPr rtlCol="0" anchor="ctr"/>
-          <a:lstStyle/>
-          <a:p>
-            <a:pPr algn="ctr"/>
-          </a:p>
-        </p:txBody>
-      </p:sp>
-      <p:sp>
-        <p:nvSpPr>
-          <p:cNvPr id="17" name="Oval 16"/>
-          <p:cNvSpPr/>
-          <p:nvPr/>
-        </p:nvSpPr>
-        <p:spPr>
-          <a:xfrm>
-            <a:off x="2786400" y="482400"/>
-            <a:ext cx="43200" cy="43200"/>
-          </a:xfrm>
-          <a:prstGeom prst="ellipse">
-            <a:avLst/>
-          </a:prstGeom>
-          <a:solidFill>
-            <a:srgbClr val="AE7429">
-              <a:alpha val="34000"/>
-            </a:srgbClr>
-          </a:solidFill>
-          <a:ln>
-            <a:noFill/>
-          </a:ln>
-        </p:spPr>
-        <p:txBody>
-          <a:bodyPr rtlCol="0" anchor="ctr"/>
-          <a:lstStyle/>
-          <a:p>
-            <a:pPr algn="ctr"/>
-          </a:p>
-        </p:txBody>
-      </p:sp>
-      <p:sp>
-        <p:nvSpPr>
-          <p:cNvPr id="18" name="Oval 17"/>
-          <p:cNvSpPr/>
-          <p:nvPr/>
-        </p:nvSpPr>
-        <p:spPr>
-          <a:xfrm>
-            <a:off x="2894400" y="158400"/>
-            <a:ext cx="43200" cy="43200"/>
-          </a:xfrm>
-          <a:prstGeom prst="ellipse">
-            <a:avLst/>
-          </a:prstGeom>
-          <a:solidFill>
-            <a:srgbClr val="AE7429">
-              <a:alpha val="70000"/>
-            </a:srgbClr>
-          </a:solidFill>
-          <a:ln>
-            <a:noFill/>
-          </a:ln>
-        </p:spPr>
-        <p:txBody>
-          <a:bodyPr rtlCol="0" anchor="ctr"/>
-          <a:lstStyle/>
-          <a:p>
-            <a:pPr algn="ctr"/>
-          </a:p>
-        </p:txBody>
-      </p:sp>
-      <p:sp>
-        <p:nvSpPr>
-          <p:cNvPr id="19" name="Oval 18"/>
-          <p:cNvSpPr/>
-          <p:nvPr/>
-        </p:nvSpPr>
-        <p:spPr>
-          <a:xfrm>
-            <a:off x="2894400" y="266400"/>
-            <a:ext cx="43200" cy="43200"/>
-          </a:xfrm>
-          <a:prstGeom prst="ellipse">
-            <a:avLst/>
-          </a:prstGeom>
-          <a:solidFill>
-            <a:srgbClr val="AE7429">
-              <a:alpha val="57999"/>
-            </a:srgbClr>
-          </a:solidFill>
-          <a:ln>
-            <a:noFill/>
-          </a:ln>
-        </p:spPr>
-        <p:txBody>
-          <a:bodyPr rtlCol="0" anchor="ctr"/>
-          <a:lstStyle/>
-          <a:p>
-            <a:pPr algn="ctr"/>
-          </a:p>
-        </p:txBody>
-      </p:sp>
-      <p:sp>
-        <p:nvSpPr>
-          <p:cNvPr id="20" name="Oval 19"/>
-          <p:cNvSpPr/>
-          <p:nvPr/>
-        </p:nvSpPr>
-        <p:spPr>
-          <a:xfrm>
-            <a:off x="2894400" y="374400"/>
-            <a:ext cx="43200" cy="43200"/>
-          </a:xfrm>
-          <a:prstGeom prst="ellipse">
-            <a:avLst/>
-          </a:prstGeom>
-          <a:solidFill>
-            <a:srgbClr val="AE7429">
-              <a:alpha val="46000"/>
-            </a:srgbClr>
-          </a:solidFill>
-          <a:ln>
-            <a:noFill/>
-          </a:ln>
-        </p:spPr>
-        <p:txBody>
-          <a:bodyPr rtlCol="0" anchor="ctr"/>
-          <a:lstStyle/>
-          <a:p>
-            <a:pPr algn="ctr"/>
-          </a:p>
-        </p:txBody>
-      </p:sp>
-      <p:sp>
-        <p:nvSpPr>
-          <p:cNvPr id="21" name="Oval 20"/>
-          <p:cNvSpPr/>
-          <p:nvPr/>
-        </p:nvSpPr>
-        <p:spPr>
-          <a:xfrm>
-            <a:off x="2894400" y="482400"/>
-            <a:ext cx="43200" cy="43200"/>
-          </a:xfrm>
-          <a:prstGeom prst="ellipse">
-            <a:avLst/>
-          </a:prstGeom>
-          <a:solidFill>
-            <a:srgbClr val="AE7429">
-              <a:alpha val="34000"/>
-            </a:srgbClr>
-          </a:solidFill>
-          <a:ln>
-            <a:noFill/>
-          </a:ln>
-        </p:spPr>
-        <p:txBody>
-          <a:bodyPr rtlCol="0" anchor="ctr"/>
-          <a:lstStyle/>
-          <a:p>
-            <a:pPr algn="ctr"/>
-          </a:p>
-        </p:txBody>
-      </p:sp>
-      <p:sp>
-        <p:nvSpPr>
-          <p:cNvPr id="22" name="Rectangle 21"/>
-          <p:cNvSpPr/>
-          <p:nvPr/>
-        </p:nvSpPr>
-        <p:spPr>
-          <a:xfrm>
-            <a:off x="0" y="1663200"/>
-            <a:ext cx="3240000" cy="136800"/>
-          </a:xfrm>
-          <a:prstGeom prst="rect">
-            <a:avLst/>
-          </a:prstGeom>
-          <a:solidFill>
-            <a:srgbClr val="AE7429"/>
-          </a:solidFill>
-          <a:ln>
-            <a:noFill/>
-          </a:ln>
-        </p:spPr>
-        <p:txBody>
-          <a:bodyPr rtlCol="0" anchor="ctr"/>
-          <a:lstStyle/>
-          <a:p>
-            <a:pPr algn="ctr"/>
-          </a:p>
-        </p:txBody>
-      </p:sp>
-      <p:sp>
-        <p:nvSpPr>
-          <p:cNvPr id="23" name="Rectangle 22"/>
-          <p:cNvSpPr/>
-          <p:nvPr/>
-        </p:nvSpPr>
-        <p:spPr>
-          <a:xfrm>
-            <a:off x="0" y="1663200"/>
-            <a:ext cx="936000" cy="136800"/>
-          </a:xfrm>
-          <a:prstGeom prst="rect">
-            <a:avLst/>
-          </a:prstGeom>
-          <a:solidFill>
-            <a:srgbClr val="F5E3CC"/>
-          </a:solidFill>
-          <a:ln>
-            <a:noFill/>
-          </a:ln>
-        </p:spPr>
-        <p:txBody>
-          <a:bodyPr rtlCol="0" anchor="ctr"/>
-          <a:lstStyle/>
-          <a:p>
-            <a:pPr algn="ctr"/>
-          </a:p>
-        </p:txBody>
-      </p:sp>
-      <p:sp>
-        <p:nvSpPr>
-          <p:cNvPr id="24" name="텍스트"/>
-          <p:cNvSpPr txBox="1"/>
-          <p:nvPr/>
-        </p:nvSpPr>
-        <p:spPr>
-          <a:xfrm>
-            <a:off x="252000" y="208800"/>
-            <a:ext cx="1800000" cy="100800"/>
+            <a:off x="252000" y="273600"/>
+            <a:ext cx="2160000" cy="360000"/>
           </a:xfrm>
           <a:prstGeom prst="rect">
             <a:avLst/>
@@ -3799,32 +3150,32 @@
           <a:p>
             <a:pPr algn="l">
               <a:lnSpc>
-                <a:spcPts val="1087"/>
+                <a:spcPts val="3190"/>
               </a:lnSpc>
             </a:pPr>
             <a:r>
-              <a:rPr sz="750" b="1" spc="150">
+              <a:rPr sz="2200" b="1">
                 <a:solidFill>
-                  <a:srgbClr val="85745D"/>
+                  <a:srgbClr val="12151C"/>
                 </a:solidFill>
                 <a:latin typeface="맑은 고딕"/>
                 <a:ea typeface="맑은 고딕"/>
               </a:rPr>
-              <a:t>스튜디오 이름</a:t>
-            </a:r>
-          </a:p>
-        </p:txBody>
-      </p:sp>
-      <p:sp>
-        <p:nvSpPr>
-          <p:cNvPr id="25" name="텍스트"/>
+              <a:t>홍석진</a:t>
+            </a:r>
+          </a:p>
+        </p:txBody>
+      </p:sp>
+      <p:sp>
+        <p:nvSpPr>
+          <p:cNvPr id="4" name="텍스트"/>
           <p:cNvSpPr txBox="1"/>
           <p:nvPr/>
         </p:nvSpPr>
         <p:spPr>
           <a:xfrm>
-            <a:off x="252000" y="540000"/>
-            <a:ext cx="2016000" cy="313692"/>
+            <a:off x="252000" y="676800"/>
+            <a:ext cx="2160000" cy="171451"/>
           </a:xfrm>
           <a:prstGeom prst="rect">
             <a:avLst/>
@@ -3839,32 +3190,32 @@
           <a:p>
             <a:pPr algn="l">
               <a:lnSpc>
-                <a:spcPts val="2755"/>
+                <a:spcPts val="1305"/>
               </a:lnSpc>
             </a:pPr>
             <a:r>
-              <a:rPr sz="1900" b="1" spc="50">
+              <a:rPr sz="900" b="0">
                 <a:solidFill>
-                  <a:srgbClr val="5B3D15"/>
+                  <a:srgbClr val="6B7280"/>
                 </a:solidFill>
                 <a:latin typeface="맑은 고딕"/>
                 <a:ea typeface="맑은 고딕"/>
               </a:rPr>
-              <a:t>홍석진</a:t>
-            </a:r>
-          </a:p>
-        </p:txBody>
-      </p:sp>
-      <p:sp>
-        <p:nvSpPr>
-          <p:cNvPr id="26" name="텍스트"/>
+              <a:t>브랜드 디자이너</a:t>
+            </a:r>
+          </a:p>
+        </p:txBody>
+      </p:sp>
+      <p:sp>
+        <p:nvSpPr>
+          <p:cNvPr id="5" name="텍스트"/>
           <p:cNvSpPr txBox="1"/>
           <p:nvPr/>
         </p:nvSpPr>
         <p:spPr>
           <a:xfrm>
-            <a:off x="252000" y="828000"/>
-            <a:ext cx="2016000" cy="122400"/>
+            <a:off x="1548000" y="230400"/>
+            <a:ext cx="1440000" cy="123826"/>
           </a:xfrm>
           <a:prstGeom prst="rect">
             <a:avLst/>
@@ -3877,34 +3228,55 @@
           </a:bodyPr>
           <a:lstStyle/>
           <a:p>
-            <a:pPr algn="l">
+            <a:pPr algn="r">
               <a:lnSpc>
-                <a:spcPts val="1232"/>
+                <a:spcPts val="942"/>
               </a:lnSpc>
             </a:pPr>
             <a:r>
-              <a:rPr sz="850" b="1">
+              <a:rPr sz="650" b="1" spc="200">
                 <a:solidFill>
-                  <a:srgbClr val="9D6825"/>
+                  <a:srgbClr val="6B7280"/>
                 </a:solidFill>
                 <a:latin typeface="맑은 고딕"/>
                 <a:ea typeface="맑은 고딕"/>
               </a:rPr>
-              <a:t>브랜드 디자이너</a:t>
-            </a:r>
-          </a:p>
-        </p:txBody>
-      </p:sp>
-      <p:sp>
-        <p:nvSpPr>
-          <p:cNvPr id="27" name="텍스트"/>
+              <a:t>스튜디오 이름</a:t>
+            </a:r>
+          </a:p>
+        </p:txBody>
+      </p:sp>
+      <p:cxnSp>
+        <p:nvCxnSpPr>
+          <p:cNvPr id="6" name="Connector 5"/>
+          <p:cNvCxnSpPr/>
+          <p:nvPr/>
+        </p:nvCxnSpPr>
+        <p:spPr>
+          <a:xfrm>
+            <a:off x="252000" y="1051200"/>
+            <a:ext cx="2736000" cy="0"/>
+          </a:xfrm>
+          <a:prstGeom prst="line">
+            <a:avLst/>
+          </a:prstGeom>
+          <a:ln w="5760">
+            <a:solidFill>
+              <a:srgbClr val="E3E5E9"/>
+            </a:solidFill>
+          </a:ln>
+        </p:spPr>
+      </p:cxnSp>
+      <p:sp>
+        <p:nvSpPr>
+          <p:cNvPr id="7" name="텍스트"/>
           <p:cNvSpPr txBox="1"/>
           <p:nvPr/>
         </p:nvSpPr>
         <p:spPr>
           <a:xfrm>
-            <a:off x="252000" y="1108800"/>
-            <a:ext cx="122400" cy="168911"/>
+            <a:off x="252000" y="1123200"/>
+            <a:ext cx="576000" cy="99061"/>
           </a:xfrm>
           <a:prstGeom prst="rect">
             <a:avLst/>
@@ -3919,32 +3291,32 @@
           <a:p>
             <a:pPr algn="l">
               <a:lnSpc>
-                <a:spcPts val="1015"/>
+                <a:spcPts val="754"/>
               </a:lnSpc>
             </a:pPr>
             <a:r>
-              <a:rPr sz="700" b="1">
+              <a:rPr sz="520" b="1" spc="150">
                 <a:solidFill>
-                  <a:srgbClr val="9D6825"/>
+                  <a:srgbClr val="6B7280"/>
                 </a:solidFill>
                 <a:latin typeface="맑은 고딕"/>
                 <a:ea typeface="맑은 고딕"/>
               </a:rPr>
-              <a:t>T</a:t>
-            </a:r>
-          </a:p>
-        </p:txBody>
-      </p:sp>
-      <p:sp>
-        <p:nvSpPr>
-          <p:cNvPr id="28" name="텍스트"/>
+              <a:t>TEL</a:t>
+            </a:r>
+          </a:p>
+        </p:txBody>
+      </p:sp>
+      <p:sp>
+        <p:nvSpPr>
+          <p:cNvPr id="8" name="텍스트"/>
           <p:cNvSpPr txBox="1"/>
           <p:nvPr/>
         </p:nvSpPr>
         <p:spPr>
           <a:xfrm>
-            <a:off x="396000" y="1108800"/>
-            <a:ext cx="1584000" cy="168911"/>
+            <a:off x="900000" y="1101600"/>
+            <a:ext cx="2088000" cy="142876"/>
           </a:xfrm>
           <a:prstGeom prst="rect">
             <a:avLst/>
@@ -3959,13 +3331,13 @@
           <a:p>
             <a:pPr algn="l">
               <a:lnSpc>
-                <a:spcPts val="1015"/>
+                <a:spcPts val="1087"/>
               </a:lnSpc>
             </a:pPr>
             <a:r>
-              <a:rPr sz="700" b="0">
+              <a:rPr sz="750" b="0">
                 <a:solidFill>
-                  <a:srgbClr val="5B3D15"/>
+                  <a:srgbClr val="12151C"/>
                 </a:solidFill>
                 <a:latin typeface="맑은 고딕"/>
                 <a:ea typeface="맑은 고딕"/>
@@ -3975,16 +3347,37 @@
           </a:p>
         </p:txBody>
       </p:sp>
-      <p:sp>
-        <p:nvSpPr>
-          <p:cNvPr id="29" name="텍스트"/>
+      <p:cxnSp>
+        <p:nvCxnSpPr>
+          <p:cNvPr id="9" name="Connector 8"/>
+          <p:cNvCxnSpPr/>
+          <p:nvPr/>
+        </p:nvCxnSpPr>
+        <p:spPr>
+          <a:xfrm>
+            <a:off x="252000" y="1274400"/>
+            <a:ext cx="2736000" cy="0"/>
+          </a:xfrm>
+          <a:prstGeom prst="line">
+            <a:avLst/>
+          </a:prstGeom>
+          <a:ln w="5760">
+            <a:solidFill>
+              <a:srgbClr val="E3E5E9"/>
+            </a:solidFill>
+          </a:ln>
+        </p:spPr>
+      </p:cxnSp>
+      <p:sp>
+        <p:nvSpPr>
+          <p:cNvPr id="10" name="텍스트"/>
           <p:cNvSpPr txBox="1"/>
           <p:nvPr/>
         </p:nvSpPr>
         <p:spPr>
           <a:xfrm>
-            <a:off x="252000" y="1277711"/>
-            <a:ext cx="122400" cy="168911"/>
+            <a:off x="252000" y="1346400"/>
+            <a:ext cx="576000" cy="99061"/>
           </a:xfrm>
           <a:prstGeom prst="rect">
             <a:avLst/>
@@ -3999,32 +3392,32 @@
           <a:p>
             <a:pPr algn="l">
               <a:lnSpc>
-                <a:spcPts val="1015"/>
+                <a:spcPts val="754"/>
               </a:lnSpc>
             </a:pPr>
             <a:r>
-              <a:rPr sz="700" b="1">
+              <a:rPr sz="520" b="1" spc="150">
                 <a:solidFill>
-                  <a:srgbClr val="9D6825"/>
+                  <a:srgbClr val="6B7280"/>
                 </a:solidFill>
                 <a:latin typeface="맑은 고딕"/>
                 <a:ea typeface="맑은 고딕"/>
               </a:rPr>
-              <a:t>E</a:t>
-            </a:r>
-          </a:p>
-        </p:txBody>
-      </p:sp>
-      <p:sp>
-        <p:nvSpPr>
-          <p:cNvPr id="30" name="텍스트"/>
+              <a:t>MAIL</a:t>
+            </a:r>
+          </a:p>
+        </p:txBody>
+      </p:sp>
+      <p:sp>
+        <p:nvSpPr>
+          <p:cNvPr id="11" name="텍스트"/>
           <p:cNvSpPr txBox="1"/>
           <p:nvPr/>
         </p:nvSpPr>
         <p:spPr>
           <a:xfrm>
-            <a:off x="396000" y="1277711"/>
-            <a:ext cx="1584000" cy="168911"/>
+            <a:off x="900000" y="1324800"/>
+            <a:ext cx="2088000" cy="142876"/>
           </a:xfrm>
           <a:prstGeom prst="rect">
             <a:avLst/>
@@ -4039,13 +3432,13 @@
           <a:p>
             <a:pPr algn="l">
               <a:lnSpc>
-                <a:spcPts val="1015"/>
+                <a:spcPts val="1087"/>
               </a:lnSpc>
             </a:pPr>
             <a:r>
-              <a:rPr sz="700" b="0">
+              <a:rPr sz="750" b="0">
                 <a:solidFill>
-                  <a:srgbClr val="5B3D15"/>
+                  <a:srgbClr val="12151C"/>
                 </a:solidFill>
                 <a:latin typeface="맑은 고딕"/>
                 <a:ea typeface="맑은 고딕"/>
@@ -4055,16 +3448,37 @@
           </a:p>
         </p:txBody>
       </p:sp>
-      <p:sp>
-        <p:nvSpPr>
-          <p:cNvPr id="31" name="텍스트"/>
+      <p:cxnSp>
+        <p:nvCxnSpPr>
+          <p:cNvPr id="12" name="Connector 11"/>
+          <p:cNvCxnSpPr/>
+          <p:nvPr/>
+        </p:nvCxnSpPr>
+        <p:spPr>
+          <a:xfrm>
+            <a:off x="252000" y="1497600"/>
+            <a:ext cx="2736000" cy="0"/>
+          </a:xfrm>
+          <a:prstGeom prst="line">
+            <a:avLst/>
+          </a:prstGeom>
+          <a:ln w="5760">
+            <a:solidFill>
+              <a:srgbClr val="E3E5E9"/>
+            </a:solidFill>
+          </a:ln>
+        </p:spPr>
+      </p:cxnSp>
+      <p:sp>
+        <p:nvSpPr>
+          <p:cNvPr id="13" name="텍스트"/>
           <p:cNvSpPr txBox="1"/>
           <p:nvPr/>
         </p:nvSpPr>
         <p:spPr>
           <a:xfrm>
-            <a:off x="252000" y="1446622"/>
-            <a:ext cx="122400" cy="168911"/>
+            <a:off x="252000" y="1569600"/>
+            <a:ext cx="576000" cy="99061"/>
           </a:xfrm>
           <a:prstGeom prst="rect">
             <a:avLst/>
@@ -4079,32 +3493,32 @@
           <a:p>
             <a:pPr algn="l">
               <a:lnSpc>
-                <a:spcPts val="1015"/>
+                <a:spcPts val="754"/>
               </a:lnSpc>
             </a:pPr>
             <a:r>
-              <a:rPr sz="700" b="1">
+              <a:rPr sz="520" b="1" spc="150">
                 <a:solidFill>
-                  <a:srgbClr val="9D6825"/>
+                  <a:srgbClr val="6B7280"/>
                 </a:solidFill>
                 <a:latin typeface="맑은 고딕"/>
                 <a:ea typeface="맑은 고딕"/>
               </a:rPr>
-              <a:t>A</a:t>
-            </a:r>
-          </a:p>
-        </p:txBody>
-      </p:sp>
-      <p:sp>
-        <p:nvSpPr>
-          <p:cNvPr id="32" name="텍스트"/>
+              <a:t>ADDR</a:t>
+            </a:r>
+          </a:p>
+        </p:txBody>
+      </p:sp>
+      <p:sp>
+        <p:nvSpPr>
+          <p:cNvPr id="14" name="텍스트"/>
           <p:cNvSpPr txBox="1"/>
           <p:nvPr/>
         </p:nvSpPr>
         <p:spPr>
           <a:xfrm>
-            <a:off x="396000" y="1446622"/>
-            <a:ext cx="1584000" cy="168911"/>
+            <a:off x="900000" y="1548000"/>
+            <a:ext cx="2088000" cy="142876"/>
           </a:xfrm>
           <a:prstGeom prst="rect">
             <a:avLst/>
@@ -4119,13 +3533,13 @@
           <a:p>
             <a:pPr algn="l">
               <a:lnSpc>
-                <a:spcPts val="1015"/>
+                <a:spcPts val="1087"/>
               </a:lnSpc>
             </a:pPr>
             <a:r>
-              <a:rPr sz="700" b="0">
+              <a:rPr sz="750" b="0">
                 <a:solidFill>
-                  <a:srgbClr val="5B3D15"/>
+                  <a:srgbClr val="12151C"/>
                 </a:solidFill>
                 <a:latin typeface="맑은 고딕"/>
                 <a:ea typeface="맑은 고딕"/>
@@ -4135,126 +3549,27 @@
           </a:p>
         </p:txBody>
       </p:sp>
-      <p:sp>
-        <p:nvSpPr>
-          <p:cNvPr id="33" name="Rounded Rectangle 32"/>
-          <p:cNvSpPr/>
+      <p:cxnSp>
+        <p:nvCxnSpPr>
+          <p:cNvPr id="15" name="Connector 14"/>
+          <p:cNvCxnSpPr/>
           <p:nvPr/>
-        </p:nvSpPr>
+        </p:nvCxnSpPr>
         <p:spPr>
           <a:xfrm>
-            <a:off x="2753280" y="1130400"/>
-            <a:ext cx="253440" cy="172800"/>
+            <a:off x="252000" y="1720800"/>
+            <a:ext cx="2736000" cy="0"/>
           </a:xfrm>
-          <a:prstGeom prst="roundRect">
-            <a:avLst>
-              <a:gd name="adj" fmla="val 16666"/>
-            </a:avLst>
+          <a:prstGeom prst="line">
+            <a:avLst/>
           </a:prstGeom>
-          <a:solidFill>
-            <a:srgbClr val="AE7429"/>
-          </a:solidFill>
-          <a:ln>
-            <a:noFill/>
+          <a:ln w="5760">
+            <a:solidFill>
+              <a:srgbClr val="E3E5E9"/>
+            </a:solidFill>
           </a:ln>
         </p:spPr>
-        <p:txBody>
-          <a:bodyPr rtlCol="0" anchor="ctr"/>
-          <a:lstStyle/>
-          <a:p>
-            <a:pPr algn="ctr"/>
-          </a:p>
-        </p:txBody>
-      </p:sp>
-      <p:sp>
-        <p:nvSpPr>
-          <p:cNvPr id="34" name="Rounded Rectangle 33"/>
-          <p:cNvSpPr/>
-          <p:nvPr/>
-        </p:nvSpPr>
-        <p:spPr>
-          <a:xfrm>
-            <a:off x="2833920" y="1090080"/>
-            <a:ext cx="92160" cy="46080"/>
-          </a:xfrm>
-          <a:prstGeom prst="roundRect">
-            <a:avLst>
-              <a:gd name="adj" fmla="val 25000"/>
-            </a:avLst>
-          </a:prstGeom>
-          <a:solidFill>
-            <a:srgbClr val="AE7429"/>
-          </a:solidFill>
-          <a:ln>
-            <a:noFill/>
-          </a:ln>
-        </p:spPr>
-        <p:txBody>
-          <a:bodyPr rtlCol="0" anchor="ctr"/>
-          <a:lstStyle/>
-          <a:p>
-            <a:pPr algn="ctr"/>
-          </a:p>
-        </p:txBody>
-      </p:sp>
-      <p:sp>
-        <p:nvSpPr>
-          <p:cNvPr id="35" name="Oval 34"/>
-          <p:cNvSpPr/>
-          <p:nvPr/>
-        </p:nvSpPr>
-        <p:spPr>
-          <a:xfrm>
-            <a:off x="2819520" y="1156320"/>
-            <a:ext cx="120960" cy="120960"/>
-          </a:xfrm>
-          <a:prstGeom prst="ellipse">
-            <a:avLst/>
-          </a:prstGeom>
-          <a:solidFill>
-            <a:srgbClr val="F5E3CC"/>
-          </a:solidFill>
-          <a:ln>
-            <a:noFill/>
-          </a:ln>
-        </p:spPr>
-        <p:txBody>
-          <a:bodyPr rtlCol="0" anchor="ctr"/>
-          <a:lstStyle/>
-          <a:p>
-            <a:pPr algn="ctr"/>
-          </a:p>
-        </p:txBody>
-      </p:sp>
-      <p:sp>
-        <p:nvSpPr>
-          <p:cNvPr id="36" name="Oval 35"/>
-          <p:cNvSpPr/>
-          <p:nvPr/>
-        </p:nvSpPr>
-        <p:spPr>
-          <a:xfrm>
-            <a:off x="2848320" y="1185120"/>
-            <a:ext cx="63360" cy="63360"/>
-          </a:xfrm>
-          <a:prstGeom prst="ellipse">
-            <a:avLst/>
-          </a:prstGeom>
-          <a:solidFill>
-            <a:srgbClr val="AE7429"/>
-          </a:solidFill>
-          <a:ln>
-            <a:noFill/>
-          </a:ln>
-        </p:spPr>
-        <p:txBody>
-          <a:bodyPr rtlCol="0" anchor="ctr"/>
-          <a:lstStyle/>
-          <a:p>
-            <a:pPr algn="ctr"/>
-          </a:p>
-        </p:txBody>
-      </p:sp>
+      </p:cxnSp>
     </p:spTree>
   </p:cSld>
   <p:clrMapOvr>
@@ -4269,7 +3584,7 @@
     <p:bg>
       <p:bgPr>
         <a:solidFill>
-          <a:srgbClr val="FFFFFF"/>
+          <a:srgbClr val="F3F4F6"/>
         </a:solidFill>
         <a:effectLst/>
       </p:bgPr>
@@ -4283,20 +3598,20 @@
       <p:grpSpPr/>
       <p:sp>
         <p:nvSpPr>
-          <p:cNvPr id="2" name="Rectangle 1"/>
+          <p:cNvPr id="2" name="Oval 1"/>
           <p:cNvSpPr/>
           <p:nvPr/>
         </p:nvSpPr>
         <p:spPr>
           <a:xfrm>
-            <a:off x="0" y="0"/>
-            <a:ext cx="273600" cy="1800000"/>
+            <a:off x="1591200" y="511200"/>
+            <a:ext cx="57600" cy="57600"/>
           </a:xfrm>
-          <a:prstGeom prst="rect">
+          <a:prstGeom prst="ellipse">
             <a:avLst/>
           </a:prstGeom>
           <a:solidFill>
-            <a:srgbClr val="AE7429"/>
+            <a:srgbClr val="FF6F8E"/>
           </a:solidFill>
           <a:ln>
             <a:noFill/>
@@ -4312,134 +3627,14 @@
       </p:sp>
       <p:sp>
         <p:nvSpPr>
-          <p:cNvPr id="3" name="Rounded Rectangle 2"/>
-          <p:cNvSpPr/>
+          <p:cNvPr id="3" name="텍스트"/>
+          <p:cNvSpPr txBox="1"/>
           <p:nvPr/>
         </p:nvSpPr>
         <p:spPr>
           <a:xfrm>
-            <a:off x="67104" y="205920"/>
-            <a:ext cx="139392" cy="95040"/>
-          </a:xfrm>
-          <a:prstGeom prst="roundRect">
-            <a:avLst>
-              <a:gd name="adj" fmla="val 16666"/>
-            </a:avLst>
-          </a:prstGeom>
-          <a:solidFill>
-            <a:srgbClr val="FFFFFF"/>
-          </a:solidFill>
-          <a:ln>
-            <a:noFill/>
-          </a:ln>
-        </p:spPr>
-        <p:txBody>
-          <a:bodyPr rtlCol="0" anchor="ctr"/>
-          <a:lstStyle/>
-          <a:p>
-            <a:pPr algn="ctr"/>
-          </a:p>
-        </p:txBody>
-      </p:sp>
-      <p:sp>
-        <p:nvSpPr>
-          <p:cNvPr id="4" name="Rounded Rectangle 3"/>
-          <p:cNvSpPr/>
-          <p:nvPr/>
-        </p:nvSpPr>
-        <p:spPr>
-          <a:xfrm>
-            <a:off x="111456" y="183744"/>
-            <a:ext cx="50688" cy="25344"/>
-          </a:xfrm>
-          <a:prstGeom prst="roundRect">
-            <a:avLst>
-              <a:gd name="adj" fmla="val 25000"/>
-            </a:avLst>
-          </a:prstGeom>
-          <a:solidFill>
-            <a:srgbClr val="FFFFFF"/>
-          </a:solidFill>
-          <a:ln>
-            <a:noFill/>
-          </a:ln>
-        </p:spPr>
-        <p:txBody>
-          <a:bodyPr rtlCol="0" anchor="ctr"/>
-          <a:lstStyle/>
-          <a:p>
-            <a:pPr algn="ctr"/>
-          </a:p>
-        </p:txBody>
-      </p:sp>
-      <p:sp>
-        <p:nvSpPr>
-          <p:cNvPr id="5" name="Oval 4"/>
-          <p:cNvSpPr/>
-          <p:nvPr/>
-        </p:nvSpPr>
-        <p:spPr>
-          <a:xfrm>
-            <a:off x="103536" y="220176"/>
-            <a:ext cx="66528" cy="66528"/>
-          </a:xfrm>
-          <a:prstGeom prst="ellipse">
-            <a:avLst/>
-          </a:prstGeom>
-          <a:solidFill>
-            <a:srgbClr val="808080"/>
-          </a:solidFill>
-          <a:ln>
-            <a:noFill/>
-          </a:ln>
-        </p:spPr>
-        <p:txBody>
-          <a:bodyPr rtlCol="0" anchor="ctr"/>
-          <a:lstStyle/>
-          <a:p>
-            <a:pPr algn="ctr"/>
-          </a:p>
-        </p:txBody>
-      </p:sp>
-      <p:sp>
-        <p:nvSpPr>
-          <p:cNvPr id="6" name="Oval 5"/>
-          <p:cNvSpPr/>
-          <p:nvPr/>
-        </p:nvSpPr>
-        <p:spPr>
-          <a:xfrm>
-            <a:off x="119376" y="236016"/>
-            <a:ext cx="34848" cy="34848"/>
-          </a:xfrm>
-          <a:prstGeom prst="ellipse">
-            <a:avLst/>
-          </a:prstGeom>
-          <a:solidFill>
-            <a:srgbClr val="FFFFFF"/>
-          </a:solidFill>
-          <a:ln>
-            <a:noFill/>
-          </a:ln>
-        </p:spPr>
-        <p:txBody>
-          <a:bodyPr rtlCol="0" anchor="ctr"/>
-          <a:lstStyle/>
-          <a:p>
-            <a:pPr algn="ctr"/>
-          </a:p>
-        </p:txBody>
-      </p:sp>
-      <p:sp>
-        <p:nvSpPr>
-          <p:cNvPr id="7" name="텍스트"/>
-          <p:cNvSpPr txBox="1"/>
-          <p:nvPr/>
-        </p:nvSpPr>
-        <p:spPr>
-          <a:xfrm>
-            <a:off x="504000" y="396000"/>
-            <a:ext cx="1800000" cy="720000"/>
+            <a:off x="396000" y="684000"/>
+            <a:ext cx="2448000" cy="504000"/>
           </a:xfrm>
           <a:prstGeom prst="rect">
             <a:avLst/>
@@ -4447,56 +3642,39 @@
           <a:noFill/>
         </p:spPr>
         <p:txBody>
-          <a:bodyPr wrap="square" lIns="0" rIns="0" tIns="0" bIns="0" anchor="ctr">
+          <a:bodyPr wrap="square" lIns="0" rIns="0" tIns="0" bIns="0" anchor="t">
             <a:spAutoFit/>
           </a:bodyPr>
           <a:lstStyle/>
           <a:p>
-            <a:pPr algn="l">
+            <a:pPr algn="ctr">
               <a:lnSpc>
-                <a:spcPts val="1667"/>
+                <a:spcPts val="1739"/>
               </a:lnSpc>
             </a:pPr>
             <a:r>
-              <a:rPr sz="1150" b="1">
+              <a:rPr sz="1200" b="1">
                 <a:solidFill>
-                  <a:srgbClr val="5B3D15"/>
+                  <a:srgbClr val="12151C"/>
                 </a:solidFill>
                 <a:latin typeface="맑은 고딕"/>
                 <a:ea typeface="맑은 고딕"/>
               </a:rPr>
-              <a:t>소중한 날을</a:t>
-            </a:r>
-          </a:p>
-          <a:p>
-            <a:pPr algn="l">
-              <a:lnSpc>
-                <a:spcPts val="1667"/>
-              </a:lnSpc>
-            </a:pPr>
-            <a:r>
-              <a:rPr sz="1150" b="1">
-                <a:solidFill>
-                  <a:srgbClr val="5B3D15"/>
-                </a:solidFill>
-                <a:latin typeface="맑은 고딕"/>
-                <a:ea typeface="맑은 고딕"/>
-              </a:rPr>
-              <a:t>정성껏 담겠습니다</a:t>
-            </a:r>
-          </a:p>
-        </p:txBody>
-      </p:sp>
-      <p:sp>
-        <p:nvSpPr>
-          <p:cNvPr id="8" name="텍스트"/>
+              <a:t>소중한 날을 정성껏 담겠습니다</a:t>
+            </a:r>
+          </a:p>
+        </p:txBody>
+      </p:sp>
+      <p:sp>
+        <p:nvSpPr>
+          <p:cNvPr id="4" name="텍스트"/>
           <p:cNvSpPr txBox="1"/>
           <p:nvPr/>
         </p:nvSpPr>
         <p:spPr>
           <a:xfrm>
-            <a:off x="504000" y="1260000"/>
-            <a:ext cx="1728000" cy="108000"/>
+            <a:off x="360000" y="1339200"/>
+            <a:ext cx="2520000" cy="123826"/>
           </a:xfrm>
           <a:prstGeom prst="rect">
             <a:avLst/>
@@ -4509,90 +3687,20 @@
           </a:bodyPr>
           <a:lstStyle/>
           <a:p>
-            <a:pPr algn="l">
+            <a:pPr algn="ctr">
               <a:lnSpc>
-                <a:spcPts val="1087"/>
+                <a:spcPts val="942"/>
               </a:lnSpc>
             </a:pPr>
             <a:r>
-              <a:rPr sz="750" b="1" spc="200">
+              <a:rPr sz="650" b="1" spc="300">
                 <a:solidFill>
-                  <a:srgbClr val="85745D"/>
+                  <a:srgbClr val="6B7280"/>
                 </a:solidFill>
                 <a:latin typeface="맑은 고딕"/>
                 <a:ea typeface="맑은 고딕"/>
               </a:rPr>
               <a:t>스튜디오 이름</a:t>
-            </a:r>
-          </a:p>
-        </p:txBody>
-      </p:sp>
-      <p:sp>
-        <p:nvSpPr>
-          <p:cNvPr id="9" name="Rectangle 8"/>
-          <p:cNvSpPr/>
-          <p:nvPr/>
-        </p:nvSpPr>
-        <p:spPr>
-          <a:xfrm>
-            <a:off x="2520000" y="216000"/>
-            <a:ext cx="468000" cy="468000"/>
-          </a:xfrm>
-          <a:prstGeom prst="rect">
-            <a:avLst/>
-          </a:prstGeom>
-          <a:noFill/>
-          <a:ln w="9000">
-            <a:solidFill>
-              <a:srgbClr val="AE7429"/>
-            </a:solidFill>
-            <a:prstDash val="dash"/>
-          </a:ln>
-        </p:spPr>
-        <p:txBody>
-          <a:bodyPr rtlCol="0" anchor="ctr"/>
-          <a:lstStyle/>
-          <a:p>
-            <a:pPr algn="ctr"/>
-          </a:p>
-        </p:txBody>
-      </p:sp>
-      <p:sp>
-        <p:nvSpPr>
-          <p:cNvPr id="10" name="텍스트"/>
-          <p:cNvSpPr txBox="1"/>
-          <p:nvPr/>
-        </p:nvSpPr>
-        <p:spPr>
-          <a:xfrm>
-            <a:off x="2520000" y="216000"/>
-            <a:ext cx="468000" cy="468000"/>
-          </a:xfrm>
-          <a:prstGeom prst="rect">
-            <a:avLst/>
-          </a:prstGeom>
-          <a:noFill/>
-        </p:spPr>
-        <p:txBody>
-          <a:bodyPr wrap="square" lIns="0" rIns="0" tIns="0" bIns="0" anchor="ctr">
-            <a:spAutoFit/>
-          </a:bodyPr>
-          <a:lstStyle/>
-          <a:p>
-            <a:pPr algn="ctr">
-              <a:lnSpc>
-                <a:spcPts val="1305"/>
-              </a:lnSpc>
-            </a:pPr>
-            <a:r>
-              <a:rPr sz="900" b="1">
-                <a:solidFill>
-                  <a:srgbClr val="85745D"/>
-                </a:solidFill>
-                <a:latin typeface="맑은 고딕"/>
-                <a:ea typeface="맑은 고딕"/>
-              </a:rPr>
-              <a:t>QR</a:t>
             </a:r>
           </a:p>
         </p:txBody>

--- a/public/fun/cards/creative/creative-20.pptx
+++ b/public/fun/cards/creative/creative-20.pptx
@@ -3105,8 +3105,8 @@
         </p:nvSpPr>
         <p:spPr>
           <a:xfrm>
-            <a:off x="252000" y="144000"/>
-            <a:ext cx="201600" cy="21600"/>
+            <a:off x="0" y="0"/>
+            <a:ext cx="3240000" cy="36000"/>
           </a:xfrm>
           <a:prstGeom prst="rect">
             <a:avLst/>
@@ -3134,8 +3134,8 @@
         </p:nvSpPr>
         <p:spPr>
           <a:xfrm>
-            <a:off x="252000" y="273600"/>
-            <a:ext cx="2160000" cy="360000"/>
+            <a:off x="252000" y="223200"/>
+            <a:ext cx="1296000" cy="237600"/>
           </a:xfrm>
           <a:prstGeom prst="rect">
             <a:avLst/>
@@ -3150,11 +3150,11 @@
           <a:p>
             <a:pPr algn="l">
               <a:lnSpc>
-                <a:spcPts val="3190"/>
+                <a:spcPts val="1957"/>
               </a:lnSpc>
             </a:pPr>
             <a:r>
-              <a:rPr sz="2200" b="1">
+              <a:rPr sz="1350" b="1" spc="120">
                 <a:solidFill>
                   <a:srgbClr val="12151C"/>
                 </a:solidFill>
@@ -3174,8 +3174,8 @@
         </p:nvSpPr>
         <p:spPr>
           <a:xfrm>
-            <a:off x="252000" y="676800"/>
-            <a:ext cx="2160000" cy="171451"/>
+            <a:off x="252000" y="475200"/>
+            <a:ext cx="1296000" cy="133351"/>
           </a:xfrm>
           <a:prstGeom prst="rect">
             <a:avLst/>
@@ -3190,11 +3190,11 @@
           <a:p>
             <a:pPr algn="l">
               <a:lnSpc>
-                <a:spcPts val="1305"/>
+                <a:spcPts val="1015"/>
               </a:lnSpc>
             </a:pPr>
             <a:r>
-              <a:rPr sz="900" b="0">
+              <a:rPr sz="700" b="0">
                 <a:solidFill>
                   <a:srgbClr val="6B7280"/>
                 </a:solidFill>
@@ -3214,7 +3214,7 @@
         </p:nvSpPr>
         <p:spPr>
           <a:xfrm>
-            <a:off x="1548000" y="230400"/>
+            <a:off x="1548000" y="259200"/>
             <a:ext cx="1440000" cy="123826"/>
           </a:xfrm>
           <a:prstGeom prst="rect">
@@ -3234,7 +3234,7 @@
               </a:lnSpc>
             </a:pPr>
             <a:r>
-              <a:rPr sz="650" b="1" spc="200">
+              <a:rPr sz="650" b="1" spc="220">
                 <a:solidFill>
                   <a:srgbClr val="6B7280"/>
                 </a:solidFill>
@@ -3254,13 +3254,13 @@
         </p:nvCxnSpPr>
         <p:spPr>
           <a:xfrm>
-            <a:off x="252000" y="1051200"/>
+            <a:off x="252000" y="907200"/>
             <a:ext cx="2736000" cy="0"/>
           </a:xfrm>
           <a:prstGeom prst="line">
             <a:avLst/>
           </a:prstGeom>
-          <a:ln w="5760">
+          <a:ln w="3600">
             <a:solidFill>
               <a:srgbClr val="E3E5E9"/>
             </a:solidFill>
@@ -3275,8 +3275,8 @@
         </p:nvSpPr>
         <p:spPr>
           <a:xfrm>
-            <a:off x="252000" y="1123200"/>
-            <a:ext cx="576000" cy="99061"/>
+            <a:off x="252000" y="986400"/>
+            <a:ext cx="576000" cy="91441"/>
           </a:xfrm>
           <a:prstGeom prst="rect">
             <a:avLst/>
@@ -3291,11 +3291,11 @@
           <a:p>
             <a:pPr algn="l">
               <a:lnSpc>
-                <a:spcPts val="754"/>
+                <a:spcPts val="696"/>
               </a:lnSpc>
             </a:pPr>
             <a:r>
-              <a:rPr sz="520" b="1" spc="150">
+              <a:rPr sz="480" b="1" spc="160">
                 <a:solidFill>
                   <a:srgbClr val="6B7280"/>
                 </a:solidFill>
@@ -3315,8 +3315,8 @@
         </p:nvSpPr>
         <p:spPr>
           <a:xfrm>
-            <a:off x="900000" y="1101600"/>
-            <a:ext cx="2088000" cy="142876"/>
+            <a:off x="936000" y="968400"/>
+            <a:ext cx="2052000" cy="133351"/>
           </a:xfrm>
           <a:prstGeom prst="rect">
             <a:avLst/>
@@ -3331,11 +3331,11 @@
           <a:p>
             <a:pPr algn="l">
               <a:lnSpc>
-                <a:spcPts val="1087"/>
+                <a:spcPts val="1015"/>
               </a:lnSpc>
             </a:pPr>
             <a:r>
-              <a:rPr sz="750" b="0">
+              <a:rPr sz="700" b="0">
                 <a:solidFill>
                   <a:srgbClr val="12151C"/>
                 </a:solidFill>
@@ -3355,13 +3355,13 @@
         </p:nvCxnSpPr>
         <p:spPr>
           <a:xfrm>
-            <a:off x="252000" y="1274400"/>
+            <a:off x="252000" y="1137600"/>
             <a:ext cx="2736000" cy="0"/>
           </a:xfrm>
           <a:prstGeom prst="line">
             <a:avLst/>
           </a:prstGeom>
-          <a:ln w="5760">
+          <a:ln w="3600">
             <a:solidFill>
               <a:srgbClr val="E3E5E9"/>
             </a:solidFill>
@@ -3376,8 +3376,8 @@
         </p:nvSpPr>
         <p:spPr>
           <a:xfrm>
-            <a:off x="252000" y="1346400"/>
-            <a:ext cx="576000" cy="99061"/>
+            <a:off x="252000" y="1216800"/>
+            <a:ext cx="576000" cy="91441"/>
           </a:xfrm>
           <a:prstGeom prst="rect">
             <a:avLst/>
@@ -3392,11 +3392,11 @@
           <a:p>
             <a:pPr algn="l">
               <a:lnSpc>
-                <a:spcPts val="754"/>
+                <a:spcPts val="696"/>
               </a:lnSpc>
             </a:pPr>
             <a:r>
-              <a:rPr sz="520" b="1" spc="150">
+              <a:rPr sz="480" b="1" spc="160">
                 <a:solidFill>
                   <a:srgbClr val="6B7280"/>
                 </a:solidFill>
@@ -3416,8 +3416,8 @@
         </p:nvSpPr>
         <p:spPr>
           <a:xfrm>
-            <a:off x="900000" y="1324800"/>
-            <a:ext cx="2088000" cy="142876"/>
+            <a:off x="936000" y="1198800"/>
+            <a:ext cx="2052000" cy="133351"/>
           </a:xfrm>
           <a:prstGeom prst="rect">
             <a:avLst/>
@@ -3432,11 +3432,11 @@
           <a:p>
             <a:pPr algn="l">
               <a:lnSpc>
-                <a:spcPts val="1087"/>
+                <a:spcPts val="1015"/>
               </a:lnSpc>
             </a:pPr>
             <a:r>
-              <a:rPr sz="750" b="0">
+              <a:rPr sz="700" b="0">
                 <a:solidFill>
                   <a:srgbClr val="12151C"/>
                 </a:solidFill>
@@ -3456,13 +3456,13 @@
         </p:nvCxnSpPr>
         <p:spPr>
           <a:xfrm>
-            <a:off x="252000" y="1497600"/>
+            <a:off x="252000" y="1368000"/>
             <a:ext cx="2736000" cy="0"/>
           </a:xfrm>
           <a:prstGeom prst="line">
             <a:avLst/>
           </a:prstGeom>
-          <a:ln w="5760">
+          <a:ln w="3600">
             <a:solidFill>
               <a:srgbClr val="E3E5E9"/>
             </a:solidFill>
@@ -3477,8 +3477,8 @@
         </p:nvSpPr>
         <p:spPr>
           <a:xfrm>
-            <a:off x="252000" y="1569600"/>
-            <a:ext cx="576000" cy="99061"/>
+            <a:off x="252000" y="1447200"/>
+            <a:ext cx="576000" cy="91441"/>
           </a:xfrm>
           <a:prstGeom prst="rect">
             <a:avLst/>
@@ -3493,11 +3493,11 @@
           <a:p>
             <a:pPr algn="l">
               <a:lnSpc>
-                <a:spcPts val="754"/>
+                <a:spcPts val="696"/>
               </a:lnSpc>
             </a:pPr>
             <a:r>
-              <a:rPr sz="520" b="1" spc="150">
+              <a:rPr sz="480" b="1" spc="160">
                 <a:solidFill>
                   <a:srgbClr val="6B7280"/>
                 </a:solidFill>
@@ -3517,8 +3517,8 @@
         </p:nvSpPr>
         <p:spPr>
           <a:xfrm>
-            <a:off x="900000" y="1548000"/>
-            <a:ext cx="2088000" cy="142876"/>
+            <a:off x="936000" y="1429200"/>
+            <a:ext cx="2052000" cy="133351"/>
           </a:xfrm>
           <a:prstGeom prst="rect">
             <a:avLst/>
@@ -3533,11 +3533,11 @@
           <a:p>
             <a:pPr algn="l">
               <a:lnSpc>
-                <a:spcPts val="1087"/>
+                <a:spcPts val="1015"/>
               </a:lnSpc>
             </a:pPr>
             <a:r>
-              <a:rPr sz="750" b="0">
+              <a:rPr sz="700" b="0">
                 <a:solidFill>
                   <a:srgbClr val="12151C"/>
                 </a:solidFill>
@@ -3557,13 +3557,13 @@
         </p:nvCxnSpPr>
         <p:spPr>
           <a:xfrm>
-            <a:off x="252000" y="1720800"/>
+            <a:off x="252000" y="1598400"/>
             <a:ext cx="2736000" cy="0"/>
           </a:xfrm>
           <a:prstGeom prst="line">
             <a:avLst/>
           </a:prstGeom>
-          <a:ln w="5760">
+          <a:ln w="3600">
             <a:solidFill>
               <a:srgbClr val="E3E5E9"/>
             </a:solidFill>
@@ -3596,18 +3596,226 @@
         <p:nvPr/>
       </p:nvGrpSpPr>
       <p:grpSpPr/>
-      <p:sp>
-        <p:nvSpPr>
-          <p:cNvPr id="2" name="Oval 1"/>
+      <p:cxnSp>
+        <p:nvCxnSpPr>
+          <p:cNvPr id="2" name="Connector 1"/>
+          <p:cNvCxnSpPr/>
+          <p:nvPr/>
+        </p:nvCxnSpPr>
+        <p:spPr>
+          <a:xfrm>
+            <a:off x="93600" y="122400"/>
+            <a:ext cx="57600" cy="0"/>
+          </a:xfrm>
+          <a:prstGeom prst="line">
+            <a:avLst/>
+          </a:prstGeom>
+          <a:ln w="3600">
+            <a:solidFill>
+              <a:srgbClr val="DCDFE4"/>
+            </a:solidFill>
+          </a:ln>
+        </p:spPr>
+      </p:cxnSp>
+      <p:cxnSp>
+        <p:nvCxnSpPr>
+          <p:cNvPr id="3" name="Connector 2"/>
+          <p:cNvCxnSpPr/>
+          <p:nvPr/>
+        </p:nvCxnSpPr>
+        <p:spPr>
+          <a:xfrm>
+            <a:off x="122400" y="93600"/>
+            <a:ext cx="0" cy="57600"/>
+          </a:xfrm>
+          <a:prstGeom prst="line">
+            <a:avLst/>
+          </a:prstGeom>
+          <a:ln w="3600">
+            <a:solidFill>
+              <a:srgbClr val="DCDFE4"/>
+            </a:solidFill>
+          </a:ln>
+        </p:spPr>
+      </p:cxnSp>
+      <p:cxnSp>
+        <p:nvCxnSpPr>
+          <p:cNvPr id="4" name="Connector 3"/>
+          <p:cNvCxnSpPr/>
+          <p:nvPr/>
+        </p:nvCxnSpPr>
+        <p:spPr>
+          <a:xfrm>
+            <a:off x="3088800" y="122400"/>
+            <a:ext cx="57600" cy="0"/>
+          </a:xfrm>
+          <a:prstGeom prst="line">
+            <a:avLst/>
+          </a:prstGeom>
+          <a:ln w="3600">
+            <a:solidFill>
+              <a:srgbClr val="DCDFE4"/>
+            </a:solidFill>
+          </a:ln>
+        </p:spPr>
+      </p:cxnSp>
+      <p:cxnSp>
+        <p:nvCxnSpPr>
+          <p:cNvPr id="5" name="Connector 4"/>
+          <p:cNvCxnSpPr/>
+          <p:nvPr/>
+        </p:nvCxnSpPr>
+        <p:spPr>
+          <a:xfrm>
+            <a:off x="3117600" y="93600"/>
+            <a:ext cx="0" cy="57600"/>
+          </a:xfrm>
+          <a:prstGeom prst="line">
+            <a:avLst/>
+          </a:prstGeom>
+          <a:ln w="3600">
+            <a:solidFill>
+              <a:srgbClr val="DCDFE4"/>
+            </a:solidFill>
+          </a:ln>
+        </p:spPr>
+      </p:cxnSp>
+      <p:cxnSp>
+        <p:nvCxnSpPr>
+          <p:cNvPr id="6" name="Connector 5"/>
+          <p:cNvCxnSpPr/>
+          <p:nvPr/>
+        </p:nvCxnSpPr>
+        <p:spPr>
+          <a:xfrm>
+            <a:off x="93600" y="1677600"/>
+            <a:ext cx="57600" cy="0"/>
+          </a:xfrm>
+          <a:prstGeom prst="line">
+            <a:avLst/>
+          </a:prstGeom>
+          <a:ln w="3600">
+            <a:solidFill>
+              <a:srgbClr val="DCDFE4"/>
+            </a:solidFill>
+          </a:ln>
+        </p:spPr>
+      </p:cxnSp>
+      <p:cxnSp>
+        <p:nvCxnSpPr>
+          <p:cNvPr id="7" name="Connector 6"/>
+          <p:cNvCxnSpPr/>
+          <p:nvPr/>
+        </p:nvCxnSpPr>
+        <p:spPr>
+          <a:xfrm>
+            <a:off x="122400" y="1648800"/>
+            <a:ext cx="0" cy="57600"/>
+          </a:xfrm>
+          <a:prstGeom prst="line">
+            <a:avLst/>
+          </a:prstGeom>
+          <a:ln w="3600">
+            <a:solidFill>
+              <a:srgbClr val="DCDFE4"/>
+            </a:solidFill>
+          </a:ln>
+        </p:spPr>
+      </p:cxnSp>
+      <p:cxnSp>
+        <p:nvCxnSpPr>
+          <p:cNvPr id="8" name="Connector 7"/>
+          <p:cNvCxnSpPr/>
+          <p:nvPr/>
+        </p:nvCxnSpPr>
+        <p:spPr>
+          <a:xfrm>
+            <a:off x="3088800" y="1677600"/>
+            <a:ext cx="57600" cy="0"/>
+          </a:xfrm>
+          <a:prstGeom prst="line">
+            <a:avLst/>
+          </a:prstGeom>
+          <a:ln w="3600">
+            <a:solidFill>
+              <a:srgbClr val="DCDFE4"/>
+            </a:solidFill>
+          </a:ln>
+        </p:spPr>
+      </p:cxnSp>
+      <p:cxnSp>
+        <p:nvCxnSpPr>
+          <p:cNvPr id="9" name="Connector 8"/>
+          <p:cNvCxnSpPr/>
+          <p:nvPr/>
+        </p:nvCxnSpPr>
+        <p:spPr>
+          <a:xfrm>
+            <a:off x="3117600" y="1648800"/>
+            <a:ext cx="0" cy="57600"/>
+          </a:xfrm>
+          <a:prstGeom prst="line">
+            <a:avLst/>
+          </a:prstGeom>
+          <a:ln w="3600">
+            <a:solidFill>
+              <a:srgbClr val="DCDFE4"/>
+            </a:solidFill>
+          </a:ln>
+        </p:spPr>
+      </p:cxnSp>
+      <p:sp>
+        <p:nvSpPr>
+          <p:cNvPr id="10" name="텍스트"/>
+          <p:cNvSpPr txBox="1"/>
+          <p:nvPr/>
+        </p:nvSpPr>
+        <p:spPr>
+          <a:xfrm>
+            <a:off x="360000" y="331200"/>
+            <a:ext cx="2520000" cy="99061"/>
+          </a:xfrm>
+          <a:prstGeom prst="rect">
+            <a:avLst/>
+          </a:prstGeom>
+          <a:noFill/>
+        </p:spPr>
+        <p:txBody>
+          <a:bodyPr wrap="square" lIns="0" rIns="0" tIns="0" bIns="0" anchor="t">
+            <a:spAutoFit/>
+          </a:bodyPr>
+          <a:lstStyle/>
+          <a:p>
+            <a:pPr algn="ctr">
+              <a:lnSpc>
+                <a:spcPts val="754"/>
+              </a:lnSpc>
+            </a:pPr>
+            <a:r>
+              <a:rPr sz="520" b="1" spc="240">
+                <a:solidFill>
+                  <a:srgbClr val="6B7280"/>
+                </a:solidFill>
+                <a:latin typeface="맑은 고딕"/>
+                <a:ea typeface="맑은 고딕"/>
+              </a:rPr>
+              <a:t>작업 분야</a:t>
+            </a:r>
+          </a:p>
+        </p:txBody>
+      </p:sp>
+      <p:sp>
+        <p:nvSpPr>
+          <p:cNvPr id="11" name="Rectangle 10"/>
           <p:cNvSpPr/>
           <p:nvPr/>
         </p:nvSpPr>
         <p:spPr>
           <a:xfrm>
-            <a:off x="1591200" y="511200"/>
-            <a:ext cx="57600" cy="57600"/>
-          </a:xfrm>
-          <a:prstGeom prst="ellipse">
+            <a:off x="1530000" y="453600"/>
+            <a:ext cx="180000" cy="14400"/>
+          </a:xfrm>
+          <a:prstGeom prst="rect">
             <a:avLst/>
           </a:prstGeom>
           <a:solidFill>
@@ -3627,14 +3835,14 @@
       </p:sp>
       <p:sp>
         <p:nvSpPr>
-          <p:cNvPr id="3" name="텍스트"/>
+          <p:cNvPr id="12" name="텍스트"/>
           <p:cNvSpPr txBox="1"/>
           <p:nvPr/>
         </p:nvSpPr>
         <p:spPr>
           <a:xfrm>
-            <a:off x="396000" y="684000"/>
-            <a:ext cx="2448000" cy="504000"/>
+            <a:off x="360000" y="684000"/>
+            <a:ext cx="630000" cy="216000"/>
           </a:xfrm>
           <a:prstGeom prst="rect">
             <a:avLst/>
@@ -3642,38 +3850,322 @@
           <a:noFill/>
         </p:spPr>
         <p:txBody>
-          <a:bodyPr wrap="square" lIns="0" rIns="0" tIns="0" bIns="0" anchor="t">
+          <a:bodyPr wrap="square" lIns="0" rIns="0" tIns="0" bIns="0" anchor="ctr">
             <a:spAutoFit/>
           </a:bodyPr>
           <a:lstStyle/>
           <a:p>
             <a:pPr algn="ctr">
               <a:lnSpc>
-                <a:spcPts val="1739"/>
+                <a:spcPts val="1015"/>
               </a:lnSpc>
             </a:pPr>
             <a:r>
-              <a:rPr sz="1200" b="1">
+              <a:rPr sz="700" b="1">
                 <a:solidFill>
                   <a:srgbClr val="12151C"/>
                 </a:solidFill>
                 <a:latin typeface="맑은 고딕"/>
                 <a:ea typeface="맑은 고딕"/>
               </a:rPr>
-              <a:t>소중한 날을 정성껏 담겠습니다</a:t>
-            </a:r>
-          </a:p>
-        </p:txBody>
-      </p:sp>
-      <p:sp>
-        <p:nvSpPr>
-          <p:cNvPr id="4" name="텍스트"/>
+              <a:t>로고 디자인</a:t>
+            </a:r>
+          </a:p>
+        </p:txBody>
+      </p:sp>
+      <p:sp>
+        <p:nvSpPr>
+          <p:cNvPr id="13" name="텍스트"/>
           <p:cNvSpPr txBox="1"/>
           <p:nvPr/>
         </p:nvSpPr>
         <p:spPr>
           <a:xfrm>
-            <a:off x="360000" y="1339200"/>
+            <a:off x="990000" y="684000"/>
+            <a:ext cx="630000" cy="216000"/>
+          </a:xfrm>
+          <a:prstGeom prst="rect">
+            <a:avLst/>
+          </a:prstGeom>
+          <a:noFill/>
+        </p:spPr>
+        <p:txBody>
+          <a:bodyPr wrap="square" lIns="0" rIns="0" tIns="0" bIns="0" anchor="ctr">
+            <a:spAutoFit/>
+          </a:bodyPr>
+          <a:lstStyle/>
+          <a:p>
+            <a:pPr algn="ctr">
+              <a:lnSpc>
+                <a:spcPts val="1015"/>
+              </a:lnSpc>
+            </a:pPr>
+            <a:r>
+              <a:rPr sz="700" b="1">
+                <a:solidFill>
+                  <a:srgbClr val="12151C"/>
+                </a:solidFill>
+                <a:latin typeface="맑은 고딕"/>
+                <a:ea typeface="맑은 고딕"/>
+              </a:rPr>
+              <a:t>모션 그래픽</a:t>
+            </a:r>
+          </a:p>
+        </p:txBody>
+      </p:sp>
+      <p:cxnSp>
+        <p:nvCxnSpPr>
+          <p:cNvPr id="14" name="Connector 13"/>
+          <p:cNvCxnSpPr/>
+          <p:nvPr/>
+        </p:nvCxnSpPr>
+        <p:spPr>
+          <a:xfrm>
+            <a:off x="990000" y="676800"/>
+            <a:ext cx="0" cy="230400"/>
+          </a:xfrm>
+          <a:prstGeom prst="line">
+            <a:avLst/>
+          </a:prstGeom>
+          <a:ln w="3600">
+            <a:solidFill>
+              <a:srgbClr val="DCDFE4"/>
+            </a:solidFill>
+          </a:ln>
+        </p:spPr>
+      </p:cxnSp>
+      <p:sp>
+        <p:nvSpPr>
+          <p:cNvPr id="15" name="텍스트"/>
+          <p:cNvSpPr txBox="1"/>
+          <p:nvPr/>
+        </p:nvSpPr>
+        <p:spPr>
+          <a:xfrm>
+            <a:off x="1620000" y="684000"/>
+            <a:ext cx="630000" cy="216000"/>
+          </a:xfrm>
+          <a:prstGeom prst="rect">
+            <a:avLst/>
+          </a:prstGeom>
+          <a:noFill/>
+        </p:spPr>
+        <p:txBody>
+          <a:bodyPr wrap="square" lIns="0" rIns="0" tIns="0" bIns="0" anchor="ctr">
+            <a:spAutoFit/>
+          </a:bodyPr>
+          <a:lstStyle/>
+          <a:p>
+            <a:pPr algn="ctr">
+              <a:lnSpc>
+                <a:spcPts val="1015"/>
+              </a:lnSpc>
+            </a:pPr>
+            <a:r>
+              <a:rPr sz="700" b="1">
+                <a:solidFill>
+                  <a:srgbClr val="12151C"/>
+                </a:solidFill>
+                <a:latin typeface="맑은 고딕"/>
+                <a:ea typeface="맑은 고딕"/>
+              </a:rPr>
+              <a:t>인물 촬영</a:t>
+            </a:r>
+          </a:p>
+        </p:txBody>
+      </p:sp>
+      <p:cxnSp>
+        <p:nvCxnSpPr>
+          <p:cNvPr id="16" name="Connector 15"/>
+          <p:cNvCxnSpPr/>
+          <p:nvPr/>
+        </p:nvCxnSpPr>
+        <p:spPr>
+          <a:xfrm>
+            <a:off x="1620000" y="676800"/>
+            <a:ext cx="0" cy="230400"/>
+          </a:xfrm>
+          <a:prstGeom prst="line">
+            <a:avLst/>
+          </a:prstGeom>
+          <a:ln w="3600">
+            <a:solidFill>
+              <a:srgbClr val="DCDFE4"/>
+            </a:solidFill>
+          </a:ln>
+        </p:spPr>
+      </p:cxnSp>
+      <p:sp>
+        <p:nvSpPr>
+          <p:cNvPr id="17" name="텍스트"/>
+          <p:cNvSpPr txBox="1"/>
+          <p:nvPr/>
+        </p:nvSpPr>
+        <p:spPr>
+          <a:xfrm>
+            <a:off x="2250000" y="684000"/>
+            <a:ext cx="630000" cy="216000"/>
+          </a:xfrm>
+          <a:prstGeom prst="rect">
+            <a:avLst/>
+          </a:prstGeom>
+          <a:noFill/>
+        </p:spPr>
+        <p:txBody>
+          <a:bodyPr wrap="square" lIns="0" rIns="0" tIns="0" bIns="0" anchor="ctr">
+            <a:spAutoFit/>
+          </a:bodyPr>
+          <a:lstStyle/>
+          <a:p>
+            <a:pPr algn="ctr">
+              <a:lnSpc>
+                <a:spcPts val="1015"/>
+              </a:lnSpc>
+            </a:pPr>
+            <a:r>
+              <a:rPr sz="700" b="1">
+                <a:solidFill>
+                  <a:srgbClr val="12151C"/>
+                </a:solidFill>
+                <a:latin typeface="맑은 고딕"/>
+                <a:ea typeface="맑은 고딕"/>
+              </a:rPr>
+              <a:t>패키지</a:t>
+            </a:r>
+          </a:p>
+        </p:txBody>
+      </p:sp>
+      <p:cxnSp>
+        <p:nvCxnSpPr>
+          <p:cNvPr id="18" name="Connector 17"/>
+          <p:cNvCxnSpPr/>
+          <p:nvPr/>
+        </p:nvCxnSpPr>
+        <p:spPr>
+          <a:xfrm>
+            <a:off x="2250000" y="676800"/>
+            <a:ext cx="0" cy="230400"/>
+          </a:xfrm>
+          <a:prstGeom prst="line">
+            <a:avLst/>
+          </a:prstGeom>
+          <a:ln w="3600">
+            <a:solidFill>
+              <a:srgbClr val="DCDFE4"/>
+            </a:solidFill>
+          </a:ln>
+        </p:spPr>
+      </p:cxnSp>
+      <p:cxnSp>
+        <p:nvCxnSpPr>
+          <p:cNvPr id="19" name="Connector 18"/>
+          <p:cNvCxnSpPr/>
+          <p:nvPr/>
+        </p:nvCxnSpPr>
+        <p:spPr>
+          <a:xfrm>
+            <a:off x="360000" y="1159200"/>
+            <a:ext cx="2520000" cy="0"/>
+          </a:xfrm>
+          <a:prstGeom prst="line">
+            <a:avLst/>
+          </a:prstGeom>
+          <a:ln w="3600">
+            <a:solidFill>
+              <a:srgbClr val="DCDFE4"/>
+            </a:solidFill>
+          </a:ln>
+        </p:spPr>
+      </p:cxnSp>
+      <p:sp>
+        <p:nvSpPr>
+          <p:cNvPr id="20" name="텍스트"/>
+          <p:cNvSpPr txBox="1"/>
+          <p:nvPr/>
+        </p:nvSpPr>
+        <p:spPr>
+          <a:xfrm>
+            <a:off x="360000" y="1245600"/>
+            <a:ext cx="1224000" cy="118111"/>
+          </a:xfrm>
+          <a:prstGeom prst="rect">
+            <a:avLst/>
+          </a:prstGeom>
+          <a:noFill/>
+        </p:spPr>
+        <p:txBody>
+          <a:bodyPr wrap="square" lIns="0" rIns="0" tIns="0" bIns="0" anchor="t">
+            <a:spAutoFit/>
+          </a:bodyPr>
+          <a:lstStyle/>
+          <a:p>
+            <a:pPr algn="ctr">
+              <a:lnSpc>
+                <a:spcPts val="899"/>
+              </a:lnSpc>
+            </a:pPr>
+            <a:r>
+              <a:rPr sz="620" b="0">
+                <a:solidFill>
+                  <a:srgbClr val="12151C"/>
+                </a:solidFill>
+                <a:latin typeface="맑은 고딕"/>
+                <a:ea typeface="맑은 고딕"/>
+              </a:rPr>
+              <a:t>평일 10:00 – 19:00</a:t>
+            </a:r>
+          </a:p>
+        </p:txBody>
+      </p:sp>
+      <p:sp>
+        <p:nvSpPr>
+          <p:cNvPr id="21" name="텍스트"/>
+          <p:cNvSpPr txBox="1"/>
+          <p:nvPr/>
+        </p:nvSpPr>
+        <p:spPr>
+          <a:xfrm>
+            <a:off x="1656000" y="1245600"/>
+            <a:ext cx="1224000" cy="118111"/>
+          </a:xfrm>
+          <a:prstGeom prst="rect">
+            <a:avLst/>
+          </a:prstGeom>
+          <a:noFill/>
+        </p:spPr>
+        <p:txBody>
+          <a:bodyPr wrap="square" lIns="0" rIns="0" tIns="0" bIns="0" anchor="t">
+            <a:spAutoFit/>
+          </a:bodyPr>
+          <a:lstStyle/>
+          <a:p>
+            <a:pPr algn="ctr">
+              <a:lnSpc>
+                <a:spcPts val="899"/>
+              </a:lnSpc>
+            </a:pPr>
+            <a:r>
+              <a:rPr sz="620" b="0">
+                <a:solidFill>
+                  <a:srgbClr val="12151C"/>
+                </a:solidFill>
+                <a:latin typeface="맑은 고딕"/>
+                <a:ea typeface="맑은 고딕"/>
+              </a:rPr>
+              <a:t>BLOG  blog.example.com</a:t>
+            </a:r>
+          </a:p>
+        </p:txBody>
+      </p:sp>
+      <p:sp>
+        <p:nvSpPr>
+          <p:cNvPr id="22" name="텍스트"/>
+          <p:cNvSpPr txBox="1"/>
+          <p:nvPr/>
+        </p:nvSpPr>
+        <p:spPr>
+          <a:xfrm>
+            <a:off x="360000" y="1526400"/>
             <a:ext cx="2520000" cy="123826"/>
           </a:xfrm>
           <a:prstGeom prst="rect">
@@ -3693,7 +4185,7 @@
               </a:lnSpc>
             </a:pPr>
             <a:r>
-              <a:rPr sz="650" b="1" spc="300">
+              <a:rPr sz="650" b="1" spc="220">
                 <a:solidFill>
                   <a:srgbClr val="6B7280"/>
                 </a:solidFill>
